--- a/dist/초6/수학/연산과비례/초6_수학_연산과비례_05_비와비율_학생용.pptx
+++ b/dist/초6/수학/연산과비례/초6_수학_연산과비례_05_비와비율_학생용.pptx
@@ -120,13 +120,13 @@
   <p:extLst>
     <p:ext uri="{521415D9-36F7-43E2-AB2F-B90AF26B5E84}">
       <p14:sectionLst xmlns:p14="http://schemas.microsoft.com/office/powerpoint/2010/main">
-        <p14:section name="도입" id="{da35ed8a-9951-879b-853e-e83ba916b9f5}">
+        <p14:section name="도입" id="{1540aeb7-8f08-8330-7c45-b575de633174}">
           <p14:sldIdLst>
             <p14:sldId id="256"/>
             <p14:sldId id="257"/>
           </p14:sldIdLst>
         </p14:section>
-        <p14:section name="개념" id="{3570c2f7-732a-0ca7-a024-75d7937033e4}">
+        <p14:section name="개념" id="{6e478bc5-4968-ddd7-e02c-80a6cbe5f1c0}">
           <p14:sldIdLst>
             <p14:sldId id="258"/>
             <p14:sldId id="259"/>
@@ -134,7 +134,7 @@
             <p14:sldId id="263"/>
           </p14:sldIdLst>
         </p14:section>
-        <p14:section name="연습" id="{9380e518-d497-8d4c-b09e-4d880aef6b10}">
+        <p14:section name="연습" id="{fa41ba68-c46d-23ca-30d8-410baf250613}">
           <p14:sldIdLst>
             <p14:sldId id="261"/>
             <p14:sldId id="262"/>
@@ -142,24 +142,24 @@
             <p14:sldId id="265"/>
           </p14:sldIdLst>
         </p14:section>
-        <p14:section name="개념" id="{5041842b-fbb4-7886-8b72-2176232a9870}">
+        <p14:section name="개념" id="{5e560231-cc25-6b17-e062-4f3320d0ab1a}">
           <p14:sldIdLst/>
         </p14:section>
-        <p14:section name="연습" id="{aa31a302-df51-5857-02f9-94c56ccc51d7}">
+        <p14:section name="연습" id="{ba438113-c6ae-c4cf-bbcb-b40435486e89}">
           <p14:sldIdLst/>
         </p14:section>
-        <p14:section name="확인" id="{398dbec1-03a9-242e-e5db-7b7c3ec6b9d6}">
+        <p14:section name="확인" id="{1ae7ce76-94b9-024c-bc85-d7eb625de3a2}">
           <p14:sldIdLst>
             <p14:sldId id="266"/>
             <p14:sldId id="267"/>
           </p14:sldIdLst>
         </p14:section>
-        <p14:section name="정리" id="{bd36dc4d-1b7c-2412-fbaf-005cf6272783}">
+        <p14:section name="정리" id="{622b8bf4-8525-02d3-44b6-ea4f476e8290}">
           <p14:sldIdLst>
             <p14:sldId id="268"/>
           </p14:sldIdLst>
         </p14:section>
-        <p14:section name="보충" id="{3322ba77-1ba2-4217-dd02-1b30ceef35ed}">
+        <p14:section name="보충" id="{7f28a3c5-461a-e83d-8541-d1d4c668554d}">
           <p14:sldIdLst>
             <p14:sldId id="269"/>
           </p14:sldIdLst>
@@ -3333,7 +3333,7 @@
                 <a:ea typeface="맑은 고딕" pitchFamily="34" charset="-122"/>
                 <a:cs typeface="맑은 고딕" pitchFamily="34" charset="-120"/>
               </a:rPr>
-              <a:t>버스가 2시간 동안 150 km를 갔어요.</a:t>
+              <a:t>버스가 2시간 동안 150 km를 갔어요.</a:t>
             </a:r>
             <a:endParaRPr lang="ko-KR" sz="2800" dirty="0"/>
           </a:p>
@@ -6822,7 +6822,7 @@
           </p:nvPr>
         </p:nvGraphicFramePr>
         <p:xfrm>
-          <a:off x="1293876" y="2286635"/>
+          <a:off x="1293876" y="2284730"/>
           <a:ext cx="9601200" cy="914400"/>
         </p:xfrm>
         <a:graphic>
@@ -6836,7 +6836,7 @@
                 <a:gridCol w="1632204"/>
                 <a:gridCol w="1632204"/>
               </a:tblGrid>
-              <a:tr h="511810">
+              <a:tr h="512572">
                 <a:tc>
                   <a:txBody>
                     <a:bodyPr/>
@@ -7178,7 +7178,7 @@
                   </a:tcPr>
                 </a:tc>
               </a:tr>
-              <a:tr h="511810">
+              <a:tr h="512572">
                 <a:tc>
                   <a:txBody>
                     <a:bodyPr/>
@@ -7520,7 +7520,7 @@
                   </a:tcPr>
                 </a:tc>
               </a:tr>
-              <a:tr h="511810">
+              <a:tr h="512572">
                 <a:tc>
                   <a:txBody>
                     <a:bodyPr/>
@@ -7862,7 +7862,7 @@
                   </a:tcPr>
                 </a:tc>
               </a:tr>
-              <a:tr h="511810">
+              <a:tr h="512572">
                 <a:tc>
                   <a:txBody>
                     <a:bodyPr/>
@@ -8204,7 +8204,7 @@
                   </a:tcPr>
                 </a:tc>
               </a:tr>
-              <a:tr h="511810">
+              <a:tr h="512572">
                 <a:tc>
                   <a:txBody>
                     <a:bodyPr/>
